--- a/assets/launcher_icon.pptx
+++ b/assets/launcher_icon.pptx
@@ -11,8 +11,9 @@
     <p:sldId id="261" r:id="rId5"/>
     <p:sldId id="263" r:id="rId6"/>
     <p:sldId id="258" r:id="rId7"/>
-    <p:sldId id="259" r:id="rId8"/>
-    <p:sldId id="262" r:id="rId9"/>
+    <p:sldId id="262" r:id="rId8"/>
+    <p:sldId id="259" r:id="rId9"/>
+    <p:sldId id="264" r:id="rId10"/>
   </p:sldIdLst>
   <p:sldSz cx="12192000" cy="6858000"/>
   <p:notesSz cx="6858000" cy="9144000"/>
@@ -8508,6 +8509,42 @@
           </a:p>
         </p:txBody>
       </p:sp>
+      <p:pic>
+        <p:nvPicPr>
+          <p:cNvPr id="4" name="Grafik 3" descr="Ein Bild, das Text, Menschliches Gesicht, Screenshot, Person enthält.&#10;&#10;Automatisch generierte Beschreibung">
+            <a:extLst>
+              <a:ext uri="{FF2B5EF4-FFF2-40B4-BE49-F238E27FC236}">
+                <a16:creationId xmlns:a16="http://schemas.microsoft.com/office/drawing/2014/main" id="{4A4A552C-A0B2-ADE9-4D47-D5FB07C9C224}"/>
+              </a:ext>
+            </a:extLst>
+          </p:cNvPr>
+          <p:cNvPicPr>
+            <a:picLocks noChangeAspect="1"/>
+          </p:cNvPicPr>
+          <p:nvPr/>
+        </p:nvPicPr>
+        <p:blipFill>
+          <a:blip r:embed="rId2">
+            <a:extLst>
+              <a:ext uri="{28A0092B-C50C-407E-A947-70E740481C1C}">
+                <a14:useLocalDpi xmlns:a14="http://schemas.microsoft.com/office/drawing/2010/main" val="0"/>
+              </a:ext>
+            </a:extLst>
+          </a:blip>
+          <a:stretch>
+            <a:fillRect/>
+          </a:stretch>
+        </p:blipFill>
+        <p:spPr>
+          <a:xfrm>
+            <a:off x="4663961" y="2038349"/>
+            <a:ext cx="877705" cy="1797539"/>
+          </a:xfrm>
+          <a:prstGeom prst="rect">
+            <a:avLst/>
+          </a:prstGeom>
+        </p:spPr>
+      </p:pic>
       <p:sp>
         <p:nvSpPr>
           <p:cNvPr id="5" name="Pfeil: nach rechts 4">
@@ -8615,7 +8652,7 @@
           <p:nvPr/>
         </p:nvPicPr>
         <p:blipFill>
-          <a:blip r:embed="rId2"/>
+          <a:blip r:embed="rId3"/>
           <a:stretch>
             <a:fillRect/>
           </a:stretch>
@@ -8630,40 +8667,10 @@
           </a:prstGeom>
         </p:spPr>
       </p:pic>
-      <p:pic>
-        <p:nvPicPr>
-          <p:cNvPr id="7" name="Grafik 6">
-            <a:extLst>
-              <a:ext uri="{FF2B5EF4-FFF2-40B4-BE49-F238E27FC236}">
-                <a16:creationId xmlns:a16="http://schemas.microsoft.com/office/drawing/2014/main" id="{3AA0CD1A-8214-5584-6257-AF62CF34DA05}"/>
-              </a:ext>
-            </a:extLst>
-          </p:cNvPr>
-          <p:cNvPicPr>
-            <a:picLocks noChangeAspect="1"/>
-          </p:cNvPicPr>
-          <p:nvPr/>
-        </p:nvPicPr>
-        <p:blipFill>
-          <a:blip r:embed="rId3"/>
-          <a:stretch>
-            <a:fillRect/>
-          </a:stretch>
-        </p:blipFill>
-        <p:spPr>
-          <a:xfrm>
-            <a:off x="4686301" y="2110939"/>
-            <a:ext cx="929502" cy="1652448"/>
-          </a:xfrm>
-          <a:prstGeom prst="rect">
-            <a:avLst/>
-          </a:prstGeom>
-        </p:spPr>
-      </p:pic>
     </p:spTree>
     <p:extLst>
       <p:ext uri="{BB962C8B-B14F-4D97-AF65-F5344CB8AC3E}">
-        <p14:creationId xmlns:p14="http://schemas.microsoft.com/office/powerpoint/2010/main" val="3540243787"/>
+        <p14:creationId xmlns:p14="http://schemas.microsoft.com/office/powerpoint/2010/main" val="85536137"/>
       </p:ext>
     </p:extLst>
   </p:cSld>
@@ -8742,42 +8749,6 @@
           </a:p>
         </p:txBody>
       </p:sp>
-      <p:pic>
-        <p:nvPicPr>
-          <p:cNvPr id="4" name="Grafik 3" descr="Ein Bild, das Text, Menschliches Gesicht, Screenshot, Person enthält.&#10;&#10;Automatisch generierte Beschreibung">
-            <a:extLst>
-              <a:ext uri="{FF2B5EF4-FFF2-40B4-BE49-F238E27FC236}">
-                <a16:creationId xmlns:a16="http://schemas.microsoft.com/office/drawing/2014/main" id="{4A4A552C-A0B2-ADE9-4D47-D5FB07C9C224}"/>
-              </a:ext>
-            </a:extLst>
-          </p:cNvPr>
-          <p:cNvPicPr>
-            <a:picLocks noChangeAspect="1"/>
-          </p:cNvPicPr>
-          <p:nvPr/>
-        </p:nvPicPr>
-        <p:blipFill>
-          <a:blip r:embed="rId2">
-            <a:extLst>
-              <a:ext uri="{28A0092B-C50C-407E-A947-70E740481C1C}">
-                <a14:useLocalDpi xmlns:a14="http://schemas.microsoft.com/office/drawing/2010/main" val="0"/>
-              </a:ext>
-            </a:extLst>
-          </a:blip>
-          <a:stretch>
-            <a:fillRect/>
-          </a:stretch>
-        </p:blipFill>
-        <p:spPr>
-          <a:xfrm>
-            <a:off x="4663961" y="2038349"/>
-            <a:ext cx="877705" cy="1797539"/>
-          </a:xfrm>
-          <a:prstGeom prst="rect">
-            <a:avLst/>
-          </a:prstGeom>
-        </p:spPr>
-      </p:pic>
       <p:sp>
         <p:nvSpPr>
           <p:cNvPr id="5" name="Pfeil: nach rechts 4">
@@ -8885,7 +8856,7 @@
           <p:nvPr/>
         </p:nvPicPr>
         <p:blipFill>
-          <a:blip r:embed="rId3"/>
+          <a:blip r:embed="rId2"/>
           <a:stretch>
             <a:fillRect/>
           </a:stretch>
@@ -8900,10 +8871,285 @@
           </a:prstGeom>
         </p:spPr>
       </p:pic>
+      <p:pic>
+        <p:nvPicPr>
+          <p:cNvPr id="7" name="Grafik 6">
+            <a:extLst>
+              <a:ext uri="{FF2B5EF4-FFF2-40B4-BE49-F238E27FC236}">
+                <a16:creationId xmlns:a16="http://schemas.microsoft.com/office/drawing/2014/main" id="{3AA0CD1A-8214-5584-6257-AF62CF34DA05}"/>
+              </a:ext>
+            </a:extLst>
+          </p:cNvPr>
+          <p:cNvPicPr>
+            <a:picLocks noChangeAspect="1"/>
+          </p:cNvPicPr>
+          <p:nvPr/>
+        </p:nvPicPr>
+        <p:blipFill>
+          <a:blip r:embed="rId3"/>
+          <a:stretch>
+            <a:fillRect/>
+          </a:stretch>
+        </p:blipFill>
+        <p:spPr>
+          <a:xfrm>
+            <a:off x="4686301" y="2110939"/>
+            <a:ext cx="929502" cy="1652448"/>
+          </a:xfrm>
+          <a:prstGeom prst="rect">
+            <a:avLst/>
+          </a:prstGeom>
+        </p:spPr>
+      </p:pic>
     </p:spTree>
     <p:extLst>
       <p:ext uri="{BB962C8B-B14F-4D97-AF65-F5344CB8AC3E}">
-        <p14:creationId xmlns:p14="http://schemas.microsoft.com/office/powerpoint/2010/main" val="85536137"/>
+        <p14:creationId xmlns:p14="http://schemas.microsoft.com/office/powerpoint/2010/main" val="3540243787"/>
+      </p:ext>
+    </p:extLst>
+  </p:cSld>
+  <p:clrMapOvr>
+    <a:masterClrMapping/>
+  </p:clrMapOvr>
+</p:sld>
+</file>
+
+<file path=ppt/slides/slide9.xml><?xml version="1.0" encoding="utf-8"?>
+<p:sld xmlns:a="http://schemas.openxmlformats.org/drawingml/2006/main" xmlns:r="http://schemas.openxmlformats.org/officeDocument/2006/relationships" xmlns:p="http://schemas.openxmlformats.org/presentationml/2006/main">
+  <p:cSld>
+    <p:spTree>
+      <p:nvGrpSpPr>
+        <p:cNvPr id="1" name="">
+          <a:extLst>
+            <a:ext uri="{FF2B5EF4-FFF2-40B4-BE49-F238E27FC236}">
+              <a16:creationId xmlns:a16="http://schemas.microsoft.com/office/drawing/2014/main" id="{2BF2FDBA-FDFF-5EAF-FEB3-5DA6D545C355}"/>
+            </a:ext>
+          </a:extLst>
+        </p:cNvPr>
+        <p:cNvGrpSpPr/>
+        <p:nvPr/>
+      </p:nvGrpSpPr>
+      <p:grpSpPr>
+        <a:xfrm>
+          <a:off x="0" y="0"/>
+          <a:ext cx="0" cy="0"/>
+          <a:chOff x="0" y="0"/>
+          <a:chExt cx="0" cy="0"/>
+        </a:xfrm>
+      </p:grpSpPr>
+      <p:sp>
+        <p:nvSpPr>
+          <p:cNvPr id="2" name="Rechteck 1">
+            <a:extLst>
+              <a:ext uri="{FF2B5EF4-FFF2-40B4-BE49-F238E27FC236}">
+                <a16:creationId xmlns:a16="http://schemas.microsoft.com/office/drawing/2014/main" id="{C759DD51-EE9D-16E1-EE9F-84E89E8C43E7}"/>
+              </a:ext>
+            </a:extLst>
+          </p:cNvPr>
+          <p:cNvSpPr/>
+          <p:nvPr/>
+        </p:nvSpPr>
+        <p:spPr>
+          <a:xfrm>
+            <a:off x="4493646" y="2038349"/>
+            <a:ext cx="3686400" cy="1800000"/>
+          </a:xfrm>
+          <a:prstGeom prst="rect">
+            <a:avLst/>
+          </a:prstGeom>
+          <a:solidFill>
+            <a:schemeClr val="bg1"/>
+          </a:solidFill>
+          <a:ln w="3175">
+            <a:solidFill>
+              <a:schemeClr val="tx1">
+                <a:lumMod val="50000"/>
+                <a:lumOff val="50000"/>
+              </a:schemeClr>
+            </a:solidFill>
+          </a:ln>
+        </p:spPr>
+        <p:style>
+          <a:lnRef idx="2">
+            <a:schemeClr val="accent1">
+              <a:shade val="15000"/>
+            </a:schemeClr>
+          </a:lnRef>
+          <a:fillRef idx="1">
+            <a:schemeClr val="accent1"/>
+          </a:fillRef>
+          <a:effectRef idx="0">
+            <a:schemeClr val="accent1"/>
+          </a:effectRef>
+          <a:fontRef idx="minor">
+            <a:schemeClr val="lt1"/>
+          </a:fontRef>
+        </p:style>
+        <p:txBody>
+          <a:bodyPr rtlCol="0" anchor="ctr"/>
+          <a:lstStyle/>
+          <a:p>
+            <a:pPr algn="ctr"/>
+            <a:endParaRPr lang="de-DE"/>
+          </a:p>
+        </p:txBody>
+      </p:sp>
+      <p:sp>
+        <p:nvSpPr>
+          <p:cNvPr id="5" name="Pfeil: nach rechts 4">
+            <a:extLst>
+              <a:ext uri="{FF2B5EF4-FFF2-40B4-BE49-F238E27FC236}">
+                <a16:creationId xmlns:a16="http://schemas.microsoft.com/office/drawing/2014/main" id="{5EB29FDC-6147-E65C-C8AB-F60E9888ECB6}"/>
+              </a:ext>
+            </a:extLst>
+          </p:cNvPr>
+          <p:cNvSpPr/>
+          <p:nvPr/>
+        </p:nvSpPr>
+        <p:spPr>
+          <a:xfrm>
+            <a:off x="5689939" y="2586970"/>
+            <a:ext cx="306475" cy="211015"/>
+          </a:xfrm>
+          <a:prstGeom prst="rightArrow">
+            <a:avLst/>
+          </a:prstGeom>
+        </p:spPr>
+        <p:style>
+          <a:lnRef idx="2">
+            <a:schemeClr val="accent2">
+              <a:shade val="15000"/>
+            </a:schemeClr>
+          </a:lnRef>
+          <a:fillRef idx="1">
+            <a:schemeClr val="accent2"/>
+          </a:fillRef>
+          <a:effectRef idx="0">
+            <a:schemeClr val="accent2"/>
+          </a:effectRef>
+          <a:fontRef idx="minor">
+            <a:schemeClr val="lt1"/>
+          </a:fontRef>
+        </p:style>
+        <p:txBody>
+          <a:bodyPr rtlCol="0" anchor="ctr"/>
+          <a:lstStyle/>
+          <a:p>
+            <a:pPr algn="ctr"/>
+            <a:endParaRPr lang="de-DE"/>
+          </a:p>
+        </p:txBody>
+      </p:sp>
+      <p:sp>
+        <p:nvSpPr>
+          <p:cNvPr id="6" name="Pfeil: nach rechts 5">
+            <a:extLst>
+              <a:ext uri="{FF2B5EF4-FFF2-40B4-BE49-F238E27FC236}">
+                <a16:creationId xmlns:a16="http://schemas.microsoft.com/office/drawing/2014/main" id="{57A974D2-D03E-1D63-8B65-3D6BF224778A}"/>
+              </a:ext>
+            </a:extLst>
+          </p:cNvPr>
+          <p:cNvSpPr/>
+          <p:nvPr/>
+        </p:nvSpPr>
+        <p:spPr>
+          <a:xfrm rot="10800000">
+            <a:off x="5665596" y="2869221"/>
+            <a:ext cx="306475" cy="211015"/>
+          </a:xfrm>
+          <a:prstGeom prst="rightArrow">
+            <a:avLst/>
+          </a:prstGeom>
+        </p:spPr>
+        <p:style>
+          <a:lnRef idx="2">
+            <a:schemeClr val="accent2">
+              <a:shade val="15000"/>
+            </a:schemeClr>
+          </a:lnRef>
+          <a:fillRef idx="1">
+            <a:schemeClr val="accent2"/>
+          </a:fillRef>
+          <a:effectRef idx="0">
+            <a:schemeClr val="accent2"/>
+          </a:effectRef>
+          <a:fontRef idx="minor">
+            <a:schemeClr val="lt1"/>
+          </a:fontRef>
+        </p:style>
+        <p:txBody>
+          <a:bodyPr rtlCol="0" anchor="ctr"/>
+          <a:lstStyle/>
+          <a:p>
+            <a:pPr algn="ctr"/>
+            <a:endParaRPr lang="de-DE"/>
+          </a:p>
+        </p:txBody>
+      </p:sp>
+      <p:pic>
+        <p:nvPicPr>
+          <p:cNvPr id="8" name="Grafik 7">
+            <a:extLst>
+              <a:ext uri="{FF2B5EF4-FFF2-40B4-BE49-F238E27FC236}">
+                <a16:creationId xmlns:a16="http://schemas.microsoft.com/office/drawing/2014/main" id="{F08A1DAC-4C6D-7B6D-6DF6-1B5B8F82B0B2}"/>
+              </a:ext>
+            </a:extLst>
+          </p:cNvPr>
+          <p:cNvPicPr>
+            <a:picLocks noChangeAspect="1"/>
+          </p:cNvPicPr>
+          <p:nvPr/>
+        </p:nvPicPr>
+        <p:blipFill>
+          <a:blip r:embed="rId2"/>
+          <a:stretch>
+            <a:fillRect/>
+          </a:stretch>
+        </p:blipFill>
+        <p:spPr>
+          <a:xfrm>
+            <a:off x="6096001" y="2038349"/>
+            <a:ext cx="1952850" cy="1797628"/>
+          </a:xfrm>
+          <a:prstGeom prst="rect">
+            <a:avLst/>
+          </a:prstGeom>
+        </p:spPr>
+      </p:pic>
+      <p:pic>
+        <p:nvPicPr>
+          <p:cNvPr id="7" name="Grafik 6">
+            <a:extLst>
+              <a:ext uri="{FF2B5EF4-FFF2-40B4-BE49-F238E27FC236}">
+                <a16:creationId xmlns:a16="http://schemas.microsoft.com/office/drawing/2014/main" id="{21F8FE77-668F-4DAD-4E27-074E6DB22F13}"/>
+              </a:ext>
+            </a:extLst>
+          </p:cNvPr>
+          <p:cNvPicPr>
+            <a:picLocks noChangeAspect="1"/>
+          </p:cNvPicPr>
+          <p:nvPr/>
+        </p:nvPicPr>
+        <p:blipFill>
+          <a:blip r:embed="rId3"/>
+          <a:stretch>
+            <a:fillRect/>
+          </a:stretch>
+        </p:blipFill>
+        <p:spPr>
+          <a:xfrm>
+            <a:off x="4686301" y="2110939"/>
+            <a:ext cx="929502" cy="1652448"/>
+          </a:xfrm>
+          <a:prstGeom prst="rect">
+            <a:avLst/>
+          </a:prstGeom>
+        </p:spPr>
+      </p:pic>
+    </p:spTree>
+    <p:extLst>
+      <p:ext uri="{BB962C8B-B14F-4D97-AF65-F5344CB8AC3E}">
+        <p14:creationId xmlns:p14="http://schemas.microsoft.com/office/powerpoint/2010/main" val="2713488457"/>
       </p:ext>
     </p:extLst>
   </p:cSld>
